--- a/docs/AiAssistant/AiAssistant-team-intro.pptx
+++ b/docs/AiAssistant/AiAssistant-team-intro.pptx
@@ -1304,7 +1304,7 @@
           <a:p>
             <a:r>
               <a:rPr lang="en-US" dirty="0"/>
-              <a:t>Ở giai đoạn requirement/basic design, thứ khan hiếm là quyết định và lý do — không phải chữ. Đây là chỗ cần chống lại bản năng của AI: nó sinh văn rất giỏi, và vài quyết định quan trọng dễ bị chôn trong văn mẫu hợp lý.</a:t>
+              <a:t>Ở giai đoạn requirement/basic design, thứ khan hiếm là quyết định và lý do — không phải chữ. ADR = Architecture Decision Record: bản ghi vài dòng cho một quyết định khó đảo ngược (bối cảnh → quyết định → hậu quả); ở đây dùng nghĩa rộng, gồm cả quyết định spec với khách hàng. Về sơ đồ: Mermaid là mặc định; PlantUML khi cần UML chuẩn (Mermaid không có activity diagram chuẩn với swimlane); drawio cho bản vẽ tay / cần layout, lưu dạng .drawio.svg. Nguyên tắc chốt: sự thật nằm ở text, sơ đồ chỉ là view — lệch nhau thì text thắng.</a:t>
             </a:r>
             <a:endParaRPr lang="en-US" dirty="0"/>
           </a:p>
@@ -8552,7 +8552,7 @@
                 <a:ea typeface="Calibri" pitchFamily="34" charset="-122"/>
                 <a:cs typeface="Calibri" pitchFamily="34" charset="-120"/>
               </a:rPr>
-              <a:t>Quyết định + bối cảnh + lý do — dạng ADR gọn: bối cảnh → quyết định → hậu quả</a:t>
+              <a:t>Quyết định + bối cảnh + lý do — ADR gọn (Architecture Decision Record): bối cảnh → quyết định → hậu quả</a:t>
             </a:r>
             <a:endParaRPr lang="en-US" sz="1350" dirty="0"/>
           </a:p>
@@ -8751,7 +8751,7 @@
         <p:spPr>
           <a:xfrm>
             <a:off x="6519672" y="2651760"/>
-            <a:ext cx="4818888" cy="2377440"/>
+            <a:ext cx="4818888" cy="2057400"/>
           </a:xfrm>
           <a:prstGeom prst="rect">
             <a:avLst/>
@@ -8768,13 +8768,13 @@
                 <a:spcPct val="106000"/>
               </a:lnSpc>
               <a:spcAft>
-                <a:spcPts val="800"/>
+                <a:spcPts val="700"/>
               </a:spcAft>
               <a:buSzPct val="100000"/>
               <a:buChar char="–"/>
             </a:pPr>
             <a:r>
-              <a:rPr lang="en-US" sz="1350" dirty="0">
+              <a:rPr lang="en-US" sz="1250" dirty="0">
                 <a:solidFill>
                   <a:srgbClr val="22263B"/>
                 </a:solidFill>
@@ -8782,9 +8782,9 @@
                 <a:ea typeface="Calibri" pitchFamily="34" charset="-122"/>
                 <a:cs typeface="Calibri" pitchFamily="34" charset="-120"/>
               </a:rPr>
-              <a:t>Diagram-as-text (Mermaid / PlantUML / drawio): sơ đồ sống — diff được, AI sửa được khi spec đổi</a:t>
-            </a:r>
-            <a:endParaRPr lang="en-US" sz="1350" dirty="0"/>
+              <a:t>Mermaid — mặc định (~80%): sequence, state, ER, flow; render native GitHub / VSCode</a:t>
+            </a:r>
+            <a:endParaRPr lang="en-US" sz="1250" dirty="0"/>
           </a:p>
           <a:p>
             <a:pPr marL="152400" indent="-152400">
@@ -8792,13 +8792,13 @@
                 <a:spcPct val="106000"/>
               </a:lnSpc>
               <a:spcAft>
-                <a:spcPts val="800"/>
+                <a:spcPts val="700"/>
               </a:spcAft>
               <a:buSzPct val="100000"/>
               <a:buChar char="–"/>
             </a:pPr>
             <a:r>
-              <a:rPr lang="en-US" sz="1350" dirty="0">
+              <a:rPr lang="en-US" sz="1250" dirty="0">
                 <a:solidFill>
                   <a:srgbClr val="22263B"/>
                 </a:solidFill>
@@ -8806,9 +8806,9 @@
                 <a:ea typeface="Calibri" pitchFamily="34" charset="-122"/>
                 <a:cs typeface="Calibri" pitchFamily="34" charset="-120"/>
               </a:rPr>
-              <a:t>Ảnh nhúng là tri thức chết → chỉ dành cho tham khảo (whiteboard, mockup), ghi rõ “không phải spec”</a:t>
-            </a:r>
-            <a:endParaRPr lang="en-US" sz="1350" dirty="0"/>
+              <a:t>PlantUML — khi cần UML chuẩn mà Mermaid thiếu (activity + swimlane, component); vẫn là text</a:t>
+            </a:r>
+            <a:endParaRPr lang="en-US" sz="1250" dirty="0"/>
           </a:p>
           <a:p>
             <a:pPr marL="152400" indent="-152400">
@@ -8816,13 +8816,13 @@
                 <a:spcPct val="106000"/>
               </a:lnSpc>
               <a:spcAft>
-                <a:spcPts val="800"/>
+                <a:spcPts val="700"/>
               </a:spcAft>
               <a:buSzPct val="100000"/>
               <a:buChar char="–"/>
             </a:pPr>
             <a:r>
-              <a:rPr lang="en-US" sz="1350" dirty="0">
+              <a:rPr lang="en-US" sz="1250" dirty="0">
                 <a:solidFill>
                   <a:srgbClr val="22263B"/>
                 </a:solidFill>
@@ -8830,15 +8830,78 @@
                 <a:ea typeface="Calibri" pitchFamily="34" charset="-122"/>
                 <a:cs typeface="Calibri" pitchFamily="34" charset="-120"/>
               </a:rPr>
-              <a:t>Hình trong tài liệu gốc → AI tái tạo thành sơ đồ, SE xác nhận, rồi bản text là chính</a:t>
-            </a:r>
-            <a:endParaRPr lang="en-US" sz="1350" dirty="0"/>
+              <a:t>drawio — khi cần layout / bản vẽ tay của SE; lưu .drawio.svg + kèm mô tả text</a:t>
+            </a:r>
+            <a:endParaRPr lang="en-US" sz="1250" dirty="0"/>
+          </a:p>
+          <a:p>
+            <a:pPr marL="152400" indent="-152400">
+              <a:lnSpc>
+                <a:spcPct val="106000"/>
+              </a:lnSpc>
+              <a:spcAft>
+                <a:spcPts val="700"/>
+              </a:spcAft>
+              <a:buSzPct val="100000"/>
+              <a:buChar char="–"/>
+            </a:pPr>
+            <a:r>
+              <a:rPr lang="en-US" sz="1250" dirty="0">
+                <a:solidFill>
+                  <a:srgbClr val="22263B"/>
+                </a:solidFill>
+                <a:latin typeface="Calibri" pitchFamily="34" charset="0"/>
+                <a:ea typeface="Calibri" pitchFamily="34" charset="-122"/>
+                <a:cs typeface="Calibri" pitchFamily="34" charset="-120"/>
+              </a:rPr>
+              <a:t>Ảnh nhúng là tri thức chết → chỉ để tham khảo, ghi rõ “không phải spec”</a:t>
+            </a:r>
+            <a:endParaRPr lang="en-US" sz="1250" dirty="0"/>
           </a:p>
         </p:txBody>
       </p:sp>
       <p:sp>
         <p:nvSpPr>
           <p:cNvPr id="14" name="Text 10"/>
+          <p:cNvSpPr/>
+          <p:nvPr/>
+        </p:nvSpPr>
+        <p:spPr>
+          <a:xfrm>
+            <a:off x="6519672" y="4709160"/>
+            <a:ext cx="4818888" cy="411480"/>
+          </a:xfrm>
+          <a:prstGeom prst="rect">
+            <a:avLst/>
+          </a:prstGeom>
+          <a:noFill/>
+          <a:ln/>
+        </p:spPr>
+        <p:txBody>
+          <a:bodyPr wrap="square" lIns="0" tIns="0" rIns="0" bIns="0" rtlCol="0" anchor="ctr"/>
+          <a:lstStyle/>
+          <a:p>
+            <a:pPr indent="0" marL="0">
+              <a:buNone/>
+            </a:pPr>
+            <a:r>
+              <a:rPr lang="en-US" sz="1250" b="1" i="1" dirty="0">
+                <a:solidFill>
+                  <a:srgbClr val="1E2761"/>
+                </a:solidFill>
+                <a:latin typeface="Calibri" pitchFamily="34" charset="0"/>
+                <a:ea typeface="Calibri" pitchFamily="34" charset="-122"/>
+                <a:cs typeface="Calibri" pitchFamily="34" charset="-120"/>
+              </a:rPr>
+              <a:t>Sự thật nằm ở text — sơ đồ là view. Lệch nhau: text thắng.</a:t>
+            </a:r>
+            <a:endParaRPr lang="en-US" sz="1250" dirty="0"/>
+          </a:p>
+        </p:txBody>
+      </p:sp>
+      <p:sp>
+        <p:nvSpPr>
+          <p:cNvPr id="15" name="Text 11"/>
           <p:cNvSpPr/>
           <p:nvPr/>
         </p:nvSpPr>

--- a/docs/AiAssistant/AiAssistant-team-intro.pptx
+++ b/docs/AiAssistant/AiAssistant-team-intro.pptx
@@ -952,7 +952,7 @@
           <a:p>
             <a:r>
               <a:rPr lang="en-US" dirty="0"/>
-              <a:t>Không chống lại thực tế: Drive vẫn là nơi làm việc với khách hàng. Nhưng vai trò được phân định — Drive là bề mặt giao tiếp, repo là nguồn sự thật duy nhất. Điểm mấu chốt ở callout: chuyển đổi theo sự kiện giải quyết luôn bài toán 'file Drive bị sửa sau khi đã chuyển đổi'.</a:t>
+              <a:t>Không chống lại thực tế: Drive vẫn là nơi làm việc với khách hàng. Nhưng vai trò được phân định — Drive là bề mặt giao tiếp, repo là nguồn sự thật duy nhất. Nhấn mạnh 'ai cầm bút': trên Drive SE tự tay là chính (thi thoảng nhờ AI); trên repo thì ngược lại — bàn với AI rồi bảo nó update, hiếm khi sửa tay, vì sửa tay đi vòng qua phần bookkeeping của AI (mục lục, liên kết chéo) khiến cơ cấu lặng lẽ lệch. Điểm mấu chốt ở callout: chuyển đổi theo sự kiện giải quyết luôn bài toán 'file Drive bị sửa sau khi đã chuyển đổi'.</a:t>
             </a:r>
             <a:endParaRPr lang="en-US" dirty="0"/>
           </a:p>
@@ -5195,13 +5195,13 @@
                 <a:spcPct val="106000"/>
               </a:lnSpc>
               <a:spcAft>
-                <a:spcPts val="800"/>
+                <a:spcPts val="600"/>
               </a:spcAft>
               <a:buSzPct val="100000"/>
               <a:buChar char="–"/>
             </a:pPr>
             <a:r>
-              <a:rPr lang="en-US" sz="1350" dirty="0">
+              <a:rPr lang="en-US" sz="1250" dirty="0">
                 <a:solidFill>
                   <a:srgbClr val="22263B"/>
                 </a:solidFill>
@@ -5211,7 +5211,7 @@
               </a:rPr>
               <a:t>Bề mặt giao tiếp / đàm phán với khách hàng và cấp cao</a:t>
             </a:r>
-            <a:endParaRPr lang="en-US" sz="1350" dirty="0"/>
+            <a:endParaRPr lang="en-US" sz="1250" dirty="0"/>
           </a:p>
           <a:p>
             <a:pPr marL="152400" indent="-152400">
@@ -5219,13 +5219,13 @@
                 <a:spcPct val="106000"/>
               </a:lnSpc>
               <a:spcAft>
-                <a:spcPts val="800"/>
+                <a:spcPts val="600"/>
               </a:spcAft>
               <a:buSzPct val="100000"/>
               <a:buChar char="–"/>
             </a:pPr>
             <a:r>
-              <a:rPr lang="en-US" sz="1350" dirty="0">
+              <a:rPr lang="en-US" sz="1250" dirty="0">
                 <a:solidFill>
                   <a:srgbClr val="22263B"/>
                 </a:solidFill>
@@ -5233,9 +5233,9 @@
                 <a:ea typeface="Calibri" pitchFamily="34" charset="-122"/>
                 <a:cs typeface="Calibri" pitchFamily="34" charset="-120"/>
               </a:rPr>
-              <a:t>Đầu vào nhất thời: đọc xong, rút tri thức, xong vai trò</a:t>
-            </a:r>
-            <a:endParaRPr lang="en-US" sz="1350" dirty="0"/>
+              <a:t>SE tự tay tạo / update là chính — thi thoảng nhờ AI (sinh bảng lớn thành xlsx, sửa trực tiếp)</a:t>
+            </a:r>
+            <a:endParaRPr lang="en-US" sz="1250" dirty="0"/>
           </a:p>
           <a:p>
             <a:pPr marL="152400" indent="-152400">
@@ -5243,13 +5243,13 @@
                 <a:spcPct val="106000"/>
               </a:lnSpc>
               <a:spcAft>
-                <a:spcPts val="800"/>
+                <a:spcPts val="600"/>
               </a:spcAft>
               <a:buSzPct val="100000"/>
               <a:buChar char="–"/>
             </a:pPr>
             <a:r>
-              <a:rPr lang="en-US" sz="1350" dirty="0">
+              <a:rPr lang="en-US" sz="1250" dirty="0">
                 <a:solidFill>
                   <a:srgbClr val="22263B"/>
                 </a:solidFill>
@@ -5257,9 +5257,9 @@
                 <a:ea typeface="Calibri" pitchFamily="34" charset="-122"/>
                 <a:cs typeface="Calibri" pitchFamily="34" charset="-120"/>
               </a:rPr>
-              <a:t>Khách hàng / leader duy trì theo thói quen của họ</a:t>
-            </a:r>
-            <a:endParaRPr lang="en-US" sz="1350" dirty="0"/>
+              <a:t>Đầu vào nhất thời: đọc xong, rút tri thức, xong vai trò</a:t>
+            </a:r>
+            <a:endParaRPr lang="en-US" sz="1250" dirty="0"/>
           </a:p>
         </p:txBody>
       </p:sp>
@@ -5477,13 +5477,13 @@
                 <a:spcPct val="106000"/>
               </a:lnSpc>
               <a:spcAft>
-                <a:spcPts val="800"/>
+                <a:spcPts val="600"/>
               </a:spcAft>
               <a:buSzPct val="100000"/>
               <a:buChar char="–"/>
             </a:pPr>
             <a:r>
-              <a:rPr lang="en-US" sz="1350" dirty="0">
+              <a:rPr lang="en-US" sz="1250" dirty="0">
                 <a:solidFill>
                   <a:srgbClr val="CADCFC"/>
                 </a:solidFill>
@@ -5493,7 +5493,7 @@
               </a:rPr>
               <a:t>Source of truth duy nhất của team</a:t>
             </a:r>
-            <a:endParaRPr lang="en-US" sz="1350" dirty="0"/>
+            <a:endParaRPr lang="en-US" sz="1250" dirty="0"/>
           </a:p>
           <a:p>
             <a:pPr marL="152400" indent="-152400">
@@ -5501,13 +5501,13 @@
                 <a:spcPct val="106000"/>
               </a:lnSpc>
               <a:spcAft>
-                <a:spcPts val="800"/>
+                <a:spcPts val="600"/>
               </a:spcAft>
               <a:buSzPct val="100000"/>
               <a:buChar char="–"/>
             </a:pPr>
             <a:r>
-              <a:rPr lang="en-US" sz="1350" dirty="0">
+              <a:rPr lang="en-US" sz="1250" dirty="0">
                 <a:solidFill>
                   <a:srgbClr val="CADCFC"/>
                 </a:solidFill>
@@ -5517,7 +5517,7 @@
               </a:rPr>
               <a:t>Tri thức sống: AI và mọi thành viên truy cập, cập nhật</a:t>
             </a:r>
-            <a:endParaRPr lang="en-US" sz="1350" dirty="0"/>
+            <a:endParaRPr lang="en-US" sz="1250" dirty="0"/>
           </a:p>
           <a:p>
             <a:pPr marL="152400" indent="-152400">
@@ -5525,13 +5525,13 @@
                 <a:spcPct val="106000"/>
               </a:lnSpc>
               <a:spcAft>
-                <a:spcPts val="800"/>
+                <a:spcPts val="600"/>
               </a:spcAft>
               <a:buSzPct val="100000"/>
               <a:buChar char="–"/>
             </a:pPr>
             <a:r>
-              <a:rPr lang="en-US" sz="1350" dirty="0">
+              <a:rPr lang="en-US" sz="1250" dirty="0">
                 <a:solidFill>
                   <a:srgbClr val="CADCFC"/>
                 </a:solidFill>
@@ -5539,9 +5539,9 @@
                 <a:ea typeface="Calibri" pitchFamily="34" charset="-122"/>
                 <a:cs typeface="Calibri" pitchFamily="34" charset="-120"/>
               </a:rPr>
-              <a:t>AI ghi — SE kiểm soát</a:t>
-            </a:r>
-            <a:endParaRPr lang="en-US" sz="1350" dirty="0"/>
+              <a:t>AI ghi — SE hiếm khi sửa tay: bàn luận với AI rồi yêu cầu “update vào các tài liệu cần thiết”, SE review diff</a:t>
+            </a:r>
+            <a:endParaRPr lang="en-US" sz="1250" dirty="0"/>
           </a:p>
         </p:txBody>
       </p:sp>
